--- a/proposals/2026-12_nmk-museum-web-maint/nmk_정성제안서_요약본.pptx
+++ b/proposals/2026-12_nmk-museum-web-maint/nmk_정성제안서_요약본.pptx
@@ -21584,7 +21584,7 @@
                 <a:cs typeface="맑은 고딕" panose="00000600000000000000" pitchFamily="2" charset="-127"/>
                 <a:sym typeface="Monotype Sorts"/>
               </a:rPr>
-              <a:t>3.1.1 만족도 조사 · 모니터링단 · 웹 접근성 인증</a:t>
+              <a:t>3.1.1 만족도 조사 · 모니터링단 · 웹 접근성 품질마크</a:t>
             </a:r>
           </a:p>
         </p:txBody>
@@ -21729,7 +21729,7 @@
                 <a:ea typeface="맑은 고딕" panose="00000800000000000000" pitchFamily="2" charset="-127"/>
                 <a:cs typeface="맑은 고딕" panose="00000800000000000000" pitchFamily="2" charset="-127"/>
               </a:rPr>
-              <a:t>만족도 조사 연 1회 · 모니터링단 연 2회 · 13개 웹 접근성 인증 지원 · DB 표준화 연 1회</a:t>
+              <a:t>만족도 조사 연 1회 · 모니터링단 연 2회 · 13개 WA 품질마크 · 모바일 접근성 · DB 표준화 연 1회</a:t>
             </a:r>
             <a:r>
               <a:rPr lang="ko-KR" altLang="en-US" sz="1200" b="1">
@@ -21759,7 +21759,7 @@
         </p:nvGraphicFramePr>
         <p:xfrm>
           <a:off x="316800" y="2358000"/>
-          <a:ext cx="6260400" cy="3391048"/>
+          <a:ext cx="6260400" cy="3457328"/>
         </p:xfrm>
         <a:graphic>
           <a:graphicData uri="http://schemas.openxmlformats.org/drawingml/2006/table">
@@ -21770,7 +21770,7 @@
                 <a:gridCol w="3677985"/>
                 <a:gridCol w="1173825"/>
               </a:tblGrid>
-              <a:tr h="522000">
+              <a:tr h="450000">
                 <a:tc>
                   <a:txBody>
                     <a:bodyPr wrap="square"/>
@@ -21788,7 +21788,7 @@
                         </a:spcAft>
                       </a:pPr>
                       <a:r>
-                        <a:rPr sz="1150" b="1">
+                        <a:rPr sz="1100" b="1">
                           <a:solidFill>
                             <a:srgbClr val="FFFFFF"/>
                           </a:solidFill>
@@ -21843,7 +21843,7 @@
                         </a:spcAft>
                       </a:pPr>
                       <a:r>
-                        <a:rPr sz="1150" b="1">
+                        <a:rPr sz="1100" b="1">
                           <a:solidFill>
                             <a:srgbClr val="FFFFFF"/>
                           </a:solidFill>
@@ -21898,7 +21898,7 @@
                         </a:spcAft>
                       </a:pPr>
                       <a:r>
-                        <a:rPr sz="1150" b="1">
+                        <a:rPr sz="1100" b="1">
                           <a:solidFill>
                             <a:srgbClr val="FFFFFF"/>
                           </a:solidFill>
@@ -21937,7 +21937,7 @@
                   </a:tcPr>
                 </a:tc>
               </a:tr>
-              <a:tr h="558000">
+              <a:tr h="486000">
                 <a:tc>
                   <a:txBody>
                     <a:bodyPr wrap="square"/>
@@ -21955,7 +21955,7 @@
                         </a:spcAft>
                       </a:pPr>
                       <a:r>
-                        <a:rPr sz="1100" b="1">
+                        <a:rPr sz="1050" b="1">
                           <a:solidFill>
                             <a:srgbClr val="222222"/>
                           </a:solidFill>
@@ -22010,7 +22010,7 @@
                         </a:spcAft>
                       </a:pPr>
                       <a:r>
-                        <a:rPr sz="1100" b="0">
+                        <a:rPr sz="1050" b="0">
                           <a:solidFill>
                             <a:srgbClr val="222222"/>
                           </a:solidFill>
@@ -22065,7 +22065,7 @@
                         </a:spcAft>
                       </a:pPr>
                       <a:r>
-                        <a:rPr sz="1100" b="0">
+                        <a:rPr sz="1050" b="0">
                           <a:solidFill>
                             <a:srgbClr val="222222"/>
                           </a:solidFill>
@@ -22104,7 +22104,7 @@
                   </a:tcPr>
                 </a:tc>
               </a:tr>
-              <a:tr h="558000">
+              <a:tr h="486000">
                 <a:tc>
                   <a:txBody>
                     <a:bodyPr wrap="square"/>
@@ -22122,7 +22122,7 @@
                         </a:spcAft>
                       </a:pPr>
                       <a:r>
-                        <a:rPr sz="1100" b="1">
+                        <a:rPr sz="1050" b="1">
                           <a:solidFill>
                             <a:srgbClr val="222222"/>
                           </a:solidFill>
@@ -22177,7 +22177,7 @@
                         </a:spcAft>
                       </a:pPr>
                       <a:r>
-                        <a:rPr sz="1100" b="0">
+                        <a:rPr sz="1050" b="0">
                           <a:solidFill>
                             <a:srgbClr val="222222"/>
                           </a:solidFill>
@@ -22232,7 +22232,7 @@
                         </a:spcAft>
                       </a:pPr>
                       <a:r>
-                        <a:rPr sz="1100" b="0">
+                        <a:rPr sz="1050" b="0">
                           <a:solidFill>
                             <a:srgbClr val="222222"/>
                           </a:solidFill>
@@ -22271,7 +22271,7 @@
                   </a:tcPr>
                 </a:tc>
               </a:tr>
-              <a:tr h="637048">
+              <a:tr h="577328">
                 <a:tc>
                   <a:txBody>
                     <a:bodyPr wrap="square"/>
@@ -22289,7 +22289,7 @@
                         </a:spcAft>
                       </a:pPr>
                       <a:r>
-                        <a:rPr sz="1100" b="1">
+                        <a:rPr sz="1050" b="1">
                           <a:solidFill>
                             <a:srgbClr val="222222"/>
                           </a:solidFill>
@@ -22297,7 +22297,7 @@
                           <a:ea typeface="맑은 고딕"/>
                           <a:cs typeface="맑은 고딕"/>
                         </a:rPr>
-                        <a:t>웹 접근성 인증</a:t>
+                        <a:t>WA 품질마크</a:t>
                       </a:r>
                     </a:p>
                   </a:txBody>
@@ -22344,7 +22344,7 @@
                         </a:spcAft>
                       </a:pPr>
                       <a:r>
-                        <a:rPr sz="1100" b="0">
+                        <a:rPr sz="1050" b="0">
                           <a:solidFill>
                             <a:srgbClr val="222222"/>
                           </a:solidFill>
@@ -22399,7 +22399,7 @@
                         </a:spcAft>
                       </a:pPr>
                       <a:r>
-                        <a:rPr sz="1100" b="0">
+                        <a:rPr sz="1050" b="0">
                           <a:solidFill>
                             <a:srgbClr val="222222"/>
                           </a:solidFill>
@@ -22438,7 +22438,7 @@
                   </a:tcPr>
                 </a:tc>
               </a:tr>
-              <a:tr h="558000">
+              <a:tr h="486000">
                 <a:tc>
                   <a:txBody>
                     <a:bodyPr wrap="square"/>
@@ -22456,7 +22456,7 @@
                         </a:spcAft>
                       </a:pPr>
                       <a:r>
-                        <a:rPr sz="1100" b="1">
+                        <a:rPr sz="1050" b="1">
                           <a:solidFill>
                             <a:srgbClr val="222222"/>
                           </a:solidFill>
@@ -22464,7 +22464,7 @@
                           <a:ea typeface="맑은 고딕"/>
                           <a:cs typeface="맑은 고딕"/>
                         </a:rPr>
-                        <a:t>DB 표준화</a:t>
+                        <a:t>모바일 웹접근성</a:t>
                       </a:r>
                     </a:p>
                   </a:txBody>
@@ -22511,7 +22511,7 @@
                         </a:spcAft>
                       </a:pPr>
                       <a:r>
-                        <a:rPr sz="1100" b="0">
+                        <a:rPr sz="1050" b="0">
                           <a:solidFill>
                             <a:srgbClr val="222222"/>
                           </a:solidFill>
@@ -22519,7 +22519,7 @@
                           <a:ea typeface="맑은 고딕"/>
                           <a:cs typeface="맑은 고딕"/>
                         </a:rPr>
-                        <a:t>문체부 공공기관 DB 표준화 · 공공데이터 품질관리</a:t>
+                        <a:t>진단도구 · 전문가 진단, 미흡 항목 보완</a:t>
                       </a:r>
                     </a:p>
                   </a:txBody>
@@ -22566,7 +22566,7 @@
                         </a:spcAft>
                       </a:pPr>
                       <a:r>
-                        <a:rPr sz="1100" b="0">
+                        <a:rPr sz="1050" b="0">
                           <a:solidFill>
                             <a:srgbClr val="222222"/>
                           </a:solidFill>
@@ -22605,7 +22605,7 @@
                   </a:tcPr>
                 </a:tc>
               </a:tr>
-              <a:tr h="558000">
+              <a:tr h="486000">
                 <a:tc>
                   <a:txBody>
                     <a:bodyPr wrap="square"/>
@@ -22623,7 +22623,7 @@
                         </a:spcAft>
                       </a:pPr>
                       <a:r>
-                        <a:rPr sz="1100" b="1">
+                        <a:rPr sz="1050" b="1">
                           <a:solidFill>
                             <a:srgbClr val="222222"/>
                           </a:solidFill>
@@ -22631,7 +22631,7 @@
                           <a:ea typeface="맑은 고딕"/>
                           <a:cs typeface="맑은 고딕"/>
                         </a:rPr>
-                        <a:t>성능 · 검색</a:t>
+                        <a:t>DB 표준화</a:t>
                       </a:r>
                     </a:p>
                   </a:txBody>
@@ -22678,7 +22678,7 @@
                         </a:spcAft>
                       </a:pPr>
                       <a:r>
-                        <a:rPr sz="1100" b="0">
+                        <a:rPr sz="1050" b="0">
                           <a:solidFill>
                             <a:srgbClr val="222222"/>
                           </a:solidFill>
@@ -22686,7 +22686,7 @@
                           <a:ea typeface="맑은 고딕"/>
                           <a:cs typeface="맑은 고딕"/>
                         </a:rPr>
-                        <a:t>응답속도 · 첫 화면 · 검색 품질 점검 · 개선</a:t>
+                        <a:t>문체부 공공기관 DB 표준화 · 공공데이터 품질관리</a:t>
                       </a:r>
                     </a:p>
                   </a:txBody>
@@ -22733,7 +22733,174 @@
                         </a:spcAft>
                       </a:pPr>
                       <a:r>
-                        <a:rPr sz="1100" b="0">
+                        <a:rPr sz="1050" b="0">
+                          <a:solidFill>
+                            <a:srgbClr val="222222"/>
+                          </a:solidFill>
+                          <a:latin typeface="맑은 고딕"/>
+                          <a:ea typeface="맑은 고딕"/>
+                          <a:cs typeface="맑은 고딕"/>
+                        </a:rPr>
+                        <a:t>연 1회</a:t>
+                      </a:r>
+                    </a:p>
+                  </a:txBody>
+                  <a:tcPr marL="36000" marR="36000" marT="18000" marB="18000" anchor="ctr">
+                    <a:lnL w="10160">
+                      <a:solidFill>
+                        <a:srgbClr val="C8D3E0"/>
+                      </a:solidFill>
+                    </a:lnL>
+                    <a:lnR w="10160">
+                      <a:solidFill>
+                        <a:srgbClr val="C8D3E0"/>
+                      </a:solidFill>
+                    </a:lnR>
+                    <a:lnT w="10160">
+                      <a:solidFill>
+                        <a:srgbClr val="C8D3E0"/>
+                      </a:solidFill>
+                    </a:lnT>
+                    <a:lnB w="10160">
+                      <a:solidFill>
+                        <a:srgbClr val="C8D3E0"/>
+                      </a:solidFill>
+                    </a:lnB>
+                    <a:solidFill>
+                      <a:srgbClr val="FFFFFF"/>
+                    </a:solidFill>
+                  </a:tcPr>
+                </a:tc>
+              </a:tr>
+              <a:tr h="486000">
+                <a:tc>
+                  <a:txBody>
+                    <a:bodyPr wrap="square"/>
+                    <a:lstStyle/>
+                    <a:p>
+                      <a:pPr algn="ctr">
+                        <a:lnSpc>
+                          <a:spcPct val="115000"/>
+                        </a:lnSpc>
+                        <a:spcBef>
+                          <a:spcPts val="0"/>
+                        </a:spcBef>
+                        <a:spcAft>
+                          <a:spcPts val="0"/>
+                        </a:spcAft>
+                      </a:pPr>
+                      <a:r>
+                        <a:rPr sz="1050" b="1">
+                          <a:solidFill>
+                            <a:srgbClr val="222222"/>
+                          </a:solidFill>
+                          <a:latin typeface="맑은 고딕"/>
+                          <a:ea typeface="맑은 고딕"/>
+                          <a:cs typeface="맑은 고딕"/>
+                        </a:rPr>
+                        <a:t>성능 · 검색</a:t>
+                      </a:r>
+                    </a:p>
+                  </a:txBody>
+                  <a:tcPr marL="36000" marR="36000" marT="18000" marB="18000" anchor="ctr">
+                    <a:lnL w="10160">
+                      <a:solidFill>
+                        <a:srgbClr val="C8D3E0"/>
+                      </a:solidFill>
+                    </a:lnL>
+                    <a:lnR w="10160">
+                      <a:solidFill>
+                        <a:srgbClr val="C8D3E0"/>
+                      </a:solidFill>
+                    </a:lnR>
+                    <a:lnT w="10160">
+                      <a:solidFill>
+                        <a:srgbClr val="C8D3E0"/>
+                      </a:solidFill>
+                    </a:lnT>
+                    <a:lnB w="10160">
+                      <a:solidFill>
+                        <a:srgbClr val="C8D3E0"/>
+                      </a:solidFill>
+                    </a:lnB>
+                    <a:solidFill>
+                      <a:srgbClr val="EEF3F9"/>
+                    </a:solidFill>
+                  </a:tcPr>
+                </a:tc>
+                <a:tc>
+                  <a:txBody>
+                    <a:bodyPr wrap="square"/>
+                    <a:lstStyle/>
+                    <a:p>
+                      <a:pPr algn="ctr">
+                        <a:lnSpc>
+                          <a:spcPct val="115000"/>
+                        </a:lnSpc>
+                        <a:spcBef>
+                          <a:spcPts val="0"/>
+                        </a:spcBef>
+                        <a:spcAft>
+                          <a:spcPts val="0"/>
+                        </a:spcAft>
+                      </a:pPr>
+                      <a:r>
+                        <a:rPr sz="1050" b="0">
+                          <a:solidFill>
+                            <a:srgbClr val="222222"/>
+                          </a:solidFill>
+                          <a:latin typeface="맑은 고딕"/>
+                          <a:ea typeface="맑은 고딕"/>
+                          <a:cs typeface="맑은 고딕"/>
+                        </a:rPr>
+                        <a:t>응답속도 · 첫 화면 · 검색 품질 점검 · 개선</a:t>
+                      </a:r>
+                    </a:p>
+                  </a:txBody>
+                  <a:tcPr marL="36000" marR="36000" marT="18000" marB="18000" anchor="ctr">
+                    <a:lnL w="10160">
+                      <a:solidFill>
+                        <a:srgbClr val="C8D3E0"/>
+                      </a:solidFill>
+                    </a:lnL>
+                    <a:lnR w="10160">
+                      <a:solidFill>
+                        <a:srgbClr val="C8D3E0"/>
+                      </a:solidFill>
+                    </a:lnR>
+                    <a:lnT w="10160">
+                      <a:solidFill>
+                        <a:srgbClr val="C8D3E0"/>
+                      </a:solidFill>
+                    </a:lnT>
+                    <a:lnB w="10160">
+                      <a:solidFill>
+                        <a:srgbClr val="C8D3E0"/>
+                      </a:solidFill>
+                    </a:lnB>
+                    <a:solidFill>
+                      <a:srgbClr val="FFFFFF"/>
+                    </a:solidFill>
+                  </a:tcPr>
+                </a:tc>
+                <a:tc>
+                  <a:txBody>
+                    <a:bodyPr wrap="square"/>
+                    <a:lstStyle/>
+                    <a:p>
+                      <a:pPr algn="l">
+                        <a:lnSpc>
+                          <a:spcPct val="115000"/>
+                        </a:lnSpc>
+                        <a:spcBef>
+                          <a:spcPts val="0"/>
+                        </a:spcBef>
+                        <a:spcAft>
+                          <a:spcPts val="0"/>
+                        </a:spcAft>
+                      </a:pPr>
+                      <a:r>
+                        <a:rPr sz="1050" b="0">
                           <a:solidFill>
                             <a:srgbClr val="222222"/>
                           </a:solidFill>
@@ -22784,8 +22951,8 @@
         </p:nvSpPr>
         <p:spPr>
           <a:xfrm>
-            <a:off x="280800" y="5857048"/>
-            <a:ext cx="6332400" cy="772583"/>
+            <a:off x="280800" y="5923328"/>
+            <a:ext cx="6332400" cy="755427"/>
           </a:xfrm>
           <a:prstGeom prst="rect">
             <a:avLst/>
@@ -22828,7 +22995,7 @@
         </p:nvSpPr>
         <p:spPr>
           <a:xfrm>
-            <a:off x="406799" y="5911048"/>
+            <a:off x="406799" y="5977328"/>
             <a:ext cx="6080400" cy="198000"/>
           </a:xfrm>
           <a:prstGeom prst="rect">
@@ -22864,8 +23031,8 @@
         </p:nvSpPr>
         <p:spPr>
           <a:xfrm>
-            <a:off x="406799" y="6109048"/>
-            <a:ext cx="6080400" cy="466583"/>
+            <a:off x="406799" y="6175328"/>
+            <a:ext cx="6080400" cy="449427"/>
           </a:xfrm>
           <a:prstGeom prst="rect">
             <a:avLst/>
@@ -22890,7 +23057,7 @@
               </a:spcAft>
             </a:pPr>
             <a:r>
-              <a:rPr sz="1150" b="0">
+              <a:rPr sz="1100" b="0">
                 <a:solidFill>
                   <a:srgbClr val="333333"/>
                 </a:solidFill>
@@ -22911,8 +23078,8 @@
         </p:nvSpPr>
         <p:spPr>
           <a:xfrm>
-            <a:off x="316800" y="6737632"/>
-            <a:ext cx="1165680" cy="1170000"/>
+            <a:off x="316800" y="6786756"/>
+            <a:ext cx="1165680" cy="1062000"/>
           </a:xfrm>
           <a:prstGeom prst="roundRect">
             <a:avLst>
@@ -22959,7 +23126,7 @@
         </p:nvSpPr>
         <p:spPr>
           <a:xfrm>
-            <a:off x="316800" y="6737632"/>
+            <a:off x="316800" y="6786756"/>
             <a:ext cx="1165680" cy="259200"/>
           </a:xfrm>
           <a:prstGeom prst="round2SameRect">
@@ -23027,8 +23194,8 @@
         </p:nvSpPr>
         <p:spPr>
           <a:xfrm>
-            <a:off x="352800" y="7025632"/>
-            <a:ext cx="1093680" cy="900000"/>
+            <a:off x="352800" y="7074756"/>
+            <a:ext cx="1093680" cy="792000"/>
           </a:xfrm>
           <a:prstGeom prst="rect">
             <a:avLst/>
@@ -23053,7 +23220,7 @@
               </a:spcAft>
             </a:pPr>
             <a:r>
-              <a:rPr sz="1150" b="0">
+              <a:rPr sz="1100" b="0">
                 <a:solidFill>
                   <a:srgbClr val="000000"/>
                 </a:solidFill>
@@ -23074,7 +23241,7 @@
         </p:nvSpPr>
         <p:spPr>
           <a:xfrm rot="5400000">
-            <a:off x="1493280" y="7279432"/>
+            <a:off x="1493280" y="7274556"/>
             <a:ext cx="86400" cy="79200"/>
           </a:xfrm>
           <a:prstGeom prst="triangle">
@@ -23118,8 +23285,8 @@
         </p:nvSpPr>
         <p:spPr>
           <a:xfrm>
-            <a:off x="1590480" y="6737632"/>
-            <a:ext cx="1165680" cy="1170000"/>
+            <a:off x="1590480" y="6786756"/>
+            <a:ext cx="1165680" cy="1062000"/>
           </a:xfrm>
           <a:prstGeom prst="roundRect">
             <a:avLst>
@@ -23166,7 +23333,7 @@
         </p:nvSpPr>
         <p:spPr>
           <a:xfrm>
-            <a:off x="1590480" y="6737632"/>
+            <a:off x="1590480" y="6786756"/>
             <a:ext cx="1165680" cy="259200"/>
           </a:xfrm>
           <a:prstGeom prst="round2SameRect">
@@ -23234,8 +23401,8 @@
         </p:nvSpPr>
         <p:spPr>
           <a:xfrm>
-            <a:off x="1626480" y="7025632"/>
-            <a:ext cx="1093680" cy="900000"/>
+            <a:off x="1626480" y="7074756"/>
+            <a:ext cx="1093680" cy="792000"/>
           </a:xfrm>
           <a:prstGeom prst="rect">
             <a:avLst/>
@@ -23260,7 +23427,7 @@
               </a:spcAft>
             </a:pPr>
             <a:r>
-              <a:rPr sz="1150" b="0">
+              <a:rPr sz="1100" b="0">
                 <a:solidFill>
                   <a:srgbClr val="000000"/>
                 </a:solidFill>
@@ -23281,7 +23448,7 @@
         </p:nvSpPr>
         <p:spPr>
           <a:xfrm rot="5400000">
-            <a:off x="2766960" y="7279432"/>
+            <a:off x="2766960" y="7274556"/>
             <a:ext cx="86400" cy="79200"/>
           </a:xfrm>
           <a:prstGeom prst="triangle">
@@ -23325,8 +23492,8 @@
         </p:nvSpPr>
         <p:spPr>
           <a:xfrm>
-            <a:off x="2864160" y="6737632"/>
-            <a:ext cx="1165680" cy="1170000"/>
+            <a:off x="2864160" y="6786756"/>
+            <a:ext cx="1165680" cy="1062000"/>
           </a:xfrm>
           <a:prstGeom prst="roundRect">
             <a:avLst>
@@ -23373,7 +23540,7 @@
         </p:nvSpPr>
         <p:spPr>
           <a:xfrm>
-            <a:off x="2864160" y="6737632"/>
+            <a:off x="2864160" y="6786756"/>
             <a:ext cx="1165680" cy="259200"/>
           </a:xfrm>
           <a:prstGeom prst="round2SameRect">
@@ -23441,8 +23608,8 @@
         </p:nvSpPr>
         <p:spPr>
           <a:xfrm>
-            <a:off x="2900160" y="7025632"/>
-            <a:ext cx="1093680" cy="900000"/>
+            <a:off x="2900160" y="7074756"/>
+            <a:ext cx="1093680" cy="792000"/>
           </a:xfrm>
           <a:prstGeom prst="rect">
             <a:avLst/>
@@ -23467,7 +23634,7 @@
               </a:spcAft>
             </a:pPr>
             <a:r>
-              <a:rPr sz="1150" b="0">
+              <a:rPr sz="1100" b="0">
                 <a:solidFill>
                   <a:srgbClr val="000000"/>
                 </a:solidFill>
@@ -23488,7 +23655,7 @@
         </p:nvSpPr>
         <p:spPr>
           <a:xfrm rot="5400000">
-            <a:off x="4040640" y="7279432"/>
+            <a:off x="4040640" y="7274556"/>
             <a:ext cx="86400" cy="79200"/>
           </a:xfrm>
           <a:prstGeom prst="triangle">
@@ -23532,8 +23699,8 @@
         </p:nvSpPr>
         <p:spPr>
           <a:xfrm>
-            <a:off x="4137840" y="6737632"/>
-            <a:ext cx="1165680" cy="1170000"/>
+            <a:off x="4137840" y="6786756"/>
+            <a:ext cx="1165680" cy="1062000"/>
           </a:xfrm>
           <a:prstGeom prst="roundRect">
             <a:avLst>
@@ -23580,7 +23747,7 @@
         </p:nvSpPr>
         <p:spPr>
           <a:xfrm>
-            <a:off x="4137840" y="6737632"/>
+            <a:off x="4137840" y="6786756"/>
             <a:ext cx="1165680" cy="259200"/>
           </a:xfrm>
           <a:prstGeom prst="round2SameRect">
@@ -23648,8 +23815,8 @@
         </p:nvSpPr>
         <p:spPr>
           <a:xfrm>
-            <a:off x="4173840" y="7025632"/>
-            <a:ext cx="1093680" cy="900000"/>
+            <a:off x="4173840" y="7074756"/>
+            <a:ext cx="1093680" cy="792000"/>
           </a:xfrm>
           <a:prstGeom prst="rect">
             <a:avLst/>
@@ -23674,7 +23841,7 @@
               </a:spcAft>
             </a:pPr>
             <a:r>
-              <a:rPr sz="1150" b="0">
+              <a:rPr sz="1100" b="0">
                 <a:solidFill>
                   <a:srgbClr val="000000"/>
                 </a:solidFill>
@@ -23695,7 +23862,7 @@
         </p:nvSpPr>
         <p:spPr>
           <a:xfrm rot="5400000">
-            <a:off x="5314320" y="7279432"/>
+            <a:off x="5314320" y="7274556"/>
             <a:ext cx="86400" cy="79200"/>
           </a:xfrm>
           <a:prstGeom prst="triangle">
@@ -23739,8 +23906,8 @@
         </p:nvSpPr>
         <p:spPr>
           <a:xfrm>
-            <a:off x="5411520" y="6737632"/>
-            <a:ext cx="1165680" cy="1170000"/>
+            <a:off x="5411520" y="6786756"/>
+            <a:ext cx="1165680" cy="1062000"/>
           </a:xfrm>
           <a:prstGeom prst="roundRect">
             <a:avLst>
@@ -23787,7 +23954,7 @@
         </p:nvSpPr>
         <p:spPr>
           <a:xfrm>
-            <a:off x="5411520" y="6737632"/>
+            <a:off x="5411520" y="6786756"/>
             <a:ext cx="1165680" cy="259200"/>
           </a:xfrm>
           <a:prstGeom prst="round2SameRect">
@@ -23855,8 +24022,8 @@
         </p:nvSpPr>
         <p:spPr>
           <a:xfrm>
-            <a:off x="5447520" y="7025632"/>
-            <a:ext cx="1093680" cy="900000"/>
+            <a:off x="5447520" y="7074756"/>
+            <a:ext cx="1093680" cy="792000"/>
           </a:xfrm>
           <a:prstGeom prst="rect">
             <a:avLst/>
@@ -23881,7 +24048,7 @@
               </a:spcAft>
             </a:pPr>
             <a:r>
-              <a:rPr sz="1150" b="0">
+              <a:rPr sz="1100" b="0">
                 <a:solidFill>
                   <a:srgbClr val="000000"/>
                 </a:solidFill>
@@ -23902,7 +24069,7 @@
         </p:nvSpPr>
         <p:spPr>
           <a:xfrm>
-            <a:off x="316800" y="8033632"/>
+            <a:off x="316800" y="7974756"/>
             <a:ext cx="3076200" cy="864000"/>
           </a:xfrm>
           <a:prstGeom prst="rect">
@@ -23948,7 +24115,7 @@
         </p:nvSpPr>
         <p:spPr>
           <a:xfrm>
-            <a:off x="316800" y="8033632"/>
+            <a:off x="316800" y="7974756"/>
             <a:ext cx="43200" cy="864000"/>
           </a:xfrm>
           <a:prstGeom prst="rect">
@@ -23992,7 +24159,7 @@
         </p:nvSpPr>
         <p:spPr>
           <a:xfrm>
-            <a:off x="424800" y="8087632"/>
+            <a:off x="424800" y="8028756"/>
             <a:ext cx="2914200" cy="396000"/>
           </a:xfrm>
           <a:prstGeom prst="rect">
@@ -24039,7 +24206,7 @@
         </p:nvSpPr>
         <p:spPr>
           <a:xfrm>
-            <a:off x="424800" y="8483632"/>
+            <a:off x="424800" y="8424756"/>
             <a:ext cx="2914200" cy="377999"/>
           </a:xfrm>
           <a:prstGeom prst="rect">
@@ -24073,7 +24240,7 @@
                 <a:ea typeface="맑은 고딕"/>
                 <a:cs typeface="맑은 고딕"/>
               </a:rPr>
-              <a:t>웹 접근성 인증 유지</a:t>
+              <a:t>WA 품질마크 유지</a:t>
             </a:r>
           </a:p>
         </p:txBody>
@@ -24086,7 +24253,7 @@
         </p:nvSpPr>
         <p:spPr>
           <a:xfrm>
-            <a:off x="3501000" y="8033632"/>
+            <a:off x="3501000" y="7974756"/>
             <a:ext cx="3076200" cy="864000"/>
           </a:xfrm>
           <a:prstGeom prst="rect">
@@ -24132,7 +24299,7 @@
         </p:nvSpPr>
         <p:spPr>
           <a:xfrm>
-            <a:off x="3501000" y="8033632"/>
+            <a:off x="3501000" y="7974756"/>
             <a:ext cx="43200" cy="864000"/>
           </a:xfrm>
           <a:prstGeom prst="rect">
@@ -24176,7 +24343,7 @@
         </p:nvSpPr>
         <p:spPr>
           <a:xfrm>
-            <a:off x="3609000" y="8087632"/>
+            <a:off x="3609000" y="8028756"/>
             <a:ext cx="2914200" cy="396000"/>
           </a:xfrm>
           <a:prstGeom prst="rect">
@@ -24223,7 +24390,7 @@
         </p:nvSpPr>
         <p:spPr>
           <a:xfrm>
-            <a:off x="3609000" y="8483632"/>
+            <a:off x="3609000" y="8424756"/>
             <a:ext cx="2914200" cy="377999"/>
           </a:xfrm>
           <a:prstGeom prst="rect">
